--- a/m9/diapositivos/sessao-04-m9-f04.pptx
+++ b/m9/diapositivos/sessao-04-m9-f04.pptx
@@ -1884,7 +1884,75 @@
                 <a:ea typeface="Georgia" pitchFamily="34" charset="-122"/>
                 <a:cs typeface="Georgia" pitchFamily="34" charset="-120"/>
               </a:rPr>
-              <a:t>A Fundação José Saramago, criada pelo escritor em 2007, tem sede na Casa dos Bicos desde 2012, com uma exposição permanente sobre a vida e a obra, «A semente e os frutos». A Casa dos Bicos foi construída em 1523 por ordem de D. Brás de Albuquerque, fica a oriente do Terreiro do Paço e é Monumento Nacional desde 1910. Vai-se a pé desde o Cais do Sodré. Os horários e as condições confirmam-se na semana da visita.</a:t>
+              <a:t>A </a:t>
+            </a:r>
+            <a:pPr indent="0" marL="0">
+              <a:lnSpc>
+                <a:spcPct val="120000"/>
+              </a:lnSpc>
+              <a:buNone/>
+            </a:pPr>
+            <a:r>
+              <a:rPr lang="en-US" sz="2300" b="1" dirty="0">
+                <a:solidFill>
+                  <a:srgbClr val="F2F0EA"/>
+                </a:solidFill>
+                <a:latin typeface="Georgia" pitchFamily="34" charset="0"/>
+                <a:ea typeface="Georgia" pitchFamily="34" charset="-122"/>
+                <a:cs typeface="Georgia" pitchFamily="34" charset="-120"/>
+              </a:rPr>
+              <a:t>Fundação José Saramago</a:t>
+            </a:r>
+            <a:pPr indent="0" marL="0">
+              <a:lnSpc>
+                <a:spcPct val="120000"/>
+              </a:lnSpc>
+              <a:buNone/>
+            </a:pPr>
+            <a:r>
+              <a:rPr lang="en-US" sz="2300" dirty="0">
+                <a:solidFill>
+                  <a:srgbClr val="F2F0EA"/>
+                </a:solidFill>
+                <a:latin typeface="Georgia" pitchFamily="34" charset="0"/>
+                <a:ea typeface="Georgia" pitchFamily="34" charset="-122"/>
+                <a:cs typeface="Georgia" pitchFamily="34" charset="-120"/>
+              </a:rPr>
+              <a:t>, criada pelo escritor em 2007, tem sede na </a:t>
+            </a:r>
+            <a:pPr indent="0" marL="0">
+              <a:lnSpc>
+                <a:spcPct val="120000"/>
+              </a:lnSpc>
+              <a:buNone/>
+            </a:pPr>
+            <a:r>
+              <a:rPr lang="en-US" sz="2300" b="1" dirty="0">
+                <a:solidFill>
+                  <a:srgbClr val="F2F0EA"/>
+                </a:solidFill>
+                <a:latin typeface="Georgia" pitchFamily="34" charset="0"/>
+                <a:ea typeface="Georgia" pitchFamily="34" charset="-122"/>
+                <a:cs typeface="Georgia" pitchFamily="34" charset="-120"/>
+              </a:rPr>
+              <a:t>Casa dos Bicos</a:t>
+            </a:r>
+            <a:pPr indent="0" marL="0">
+              <a:lnSpc>
+                <a:spcPct val="120000"/>
+              </a:lnSpc>
+              <a:buNone/>
+            </a:pPr>
+            <a:r>
+              <a:rPr lang="en-US" sz="2300" dirty="0">
+                <a:solidFill>
+                  <a:srgbClr val="F2F0EA"/>
+                </a:solidFill>
+                <a:latin typeface="Georgia" pitchFamily="34" charset="0"/>
+                <a:ea typeface="Georgia" pitchFamily="34" charset="-122"/>
+                <a:cs typeface="Georgia" pitchFamily="34" charset="-120"/>
+              </a:rPr>
+              <a:t> desde 2012, com uma exposição permanente sobre a vida e a obra, «A semente e os frutos». A Casa dos Bicos foi construída em 1523 por ordem de D. Brás de Albuquerque, fica a oriente do Terreiro do Paço e é Monumento Nacional desde 1910. Vai-se a pé desde o Cais do Sodré. Os horários e as condições confirmam-se na semana da visita.</a:t>
             </a:r>
             <a:endParaRPr lang="en-US" sz="2300" dirty="0"/>
           </a:p>
@@ -2934,7 +3002,21 @@
                           <a:ea typeface="Arial" pitchFamily="34" charset="-122"/>
                           <a:cs typeface="Arial" pitchFamily="34" charset="-120"/>
                         </a:rPr>
-                        <a:t>LIGAÇÃO AO MEMORIAL</a:t>
+                        <a:t>LIGAÇÃO AO </a:t>
+                      </a:r>
+                      <a:pPr indent="0" marL="0">
+                        <a:buNone/>
+                      </a:pPr>
+                      <a:r>
+                        <a:rPr lang="en-US" sz="1100" b="1" i="1" spc="150" kern="0" dirty="0">
+                          <a:solidFill>
+                            <a:srgbClr val="A9A79F"/>
+                          </a:solidFill>
+                          <a:latin typeface="Arial" pitchFamily="34" charset="0"/>
+                          <a:ea typeface="Arial" pitchFamily="34" charset="-122"/>
+                          <a:cs typeface="Arial" pitchFamily="34" charset="-120"/>
+                        </a:rPr>
+                        <a:t>MEMORIAL</a:t>
                       </a:r>
                       <a:endParaRPr lang="en-US" sz="1100" dirty="0">
                         <a:latin typeface="Arial" charset="0"/>
@@ -5407,7 +5489,41 @@
                 <a:ea typeface="Arial" pitchFamily="34" charset="-122"/>
                 <a:cs typeface="Arial" pitchFamily="34" charset="-120"/>
               </a:rPr>
-              <a:t>No caderno de campo, primeiro observas e registas com fonte, e só depois ligas ao Memorial; um dado biográfico novo é um facto da vida de Saramago que ainda não sabias.</a:t>
+              <a:t>No caderno de campo, primeiro observas e registas com fonte, e só depois ligas ao </a:t>
+            </a:r>
+            <a:pPr indent="0" marL="0">
+              <a:lnSpc>
+                <a:spcPct val="105000"/>
+              </a:lnSpc>
+              <a:buNone/>
+            </a:pPr>
+            <a:r>
+              <a:rPr lang="en-US" sz="2200" i="1" dirty="0">
+                <a:solidFill>
+                  <a:srgbClr val="F2F0EA"/>
+                </a:solidFill>
+                <a:latin typeface="Arial" pitchFamily="34" charset="0"/>
+                <a:ea typeface="Arial" pitchFamily="34" charset="-122"/>
+                <a:cs typeface="Arial" pitchFamily="34" charset="-120"/>
+              </a:rPr>
+              <a:t>Memorial</a:t>
+            </a:r>
+            <a:pPr indent="0" marL="0">
+              <a:lnSpc>
+                <a:spcPct val="105000"/>
+              </a:lnSpc>
+              <a:buNone/>
+            </a:pPr>
+            <a:r>
+              <a:rPr lang="en-US" sz="2200" dirty="0">
+                <a:solidFill>
+                  <a:srgbClr val="F2F0EA"/>
+                </a:solidFill>
+                <a:latin typeface="Arial" pitchFamily="34" charset="0"/>
+                <a:ea typeface="Arial" pitchFamily="34" charset="-122"/>
+                <a:cs typeface="Arial" pitchFamily="34" charset="-120"/>
+              </a:rPr>
+              <a:t>; um dado biográfico novo é um facto da vida de Saramago que ainda não sabias.</a:t>
             </a:r>
             <a:endParaRPr lang="en-US" sz="2200" dirty="0"/>
           </a:p>

--- a/m9/diapositivos/sessao-04-m9-f04.pptx
+++ b/m9/diapositivos/sessao-04-m9-f04.pptx
@@ -14,9 +14,10 @@
     <p:sldId id="262" r:id="rId8"/>
     <p:sldId id="263" r:id="rId9"/>
     <p:sldId id="264" r:id="rId10"/>
+    <p:sldId id="265" r:id="rId11"/>
   </p:sldIdLst>
   <p:notesMasterIdLst>
-    <p:notesMasterId r:id="rId11"/>
+    <p:notesMasterId r:id="rId12"/>
   </p:notesMasterIdLst>
   <p:sldSz cx="12192000" cy="6858000"/>
   <p:notesSz cx="6858000" cy="12192000"/>
@@ -1288,6 +1289,719 @@
               <a:t>Casa dos Bicos, Lisboa, sede da Fundação José Saramago (fotografia de Ingo Mehling, 2022). CC BY-SA 4.0</a:t>
             </a:r>
             <a:endParaRPr lang="en-US" sz="1100" dirty="0"/>
+          </a:p>
+        </p:txBody>
+      </p:sp>
+    </p:spTree>
+  </p:cSld>
+  <p:clrMapOvr>
+    <a:masterClrMapping/>
+  </p:clrMapOvr>
+</p:sld>
+</file>
+
+<file path=ppt/slides/slide10.xml><?xml version="1.0" encoding="utf-8"?>
+<p:sld xmlns:a="http://schemas.openxmlformats.org/drawingml/2006/main" xmlns:r="http://schemas.openxmlformats.org/officeDocument/2006/relationships" xmlns:p="http://schemas.openxmlformats.org/presentationml/2006/main">
+  <p:cSld name="Slide 10">
+    <p:bg>
+      <p:bgPr>
+        <a:solidFill>
+          <a:srgbClr val="111111"/>
+        </a:solidFill>
+      </p:bgPr>
+    </p:bg>
+    <p:spTree>
+      <p:nvGrpSpPr>
+        <p:cNvPr id="1" name=""/>
+        <p:cNvGrpSpPr/>
+        <p:nvPr/>
+      </p:nvGrpSpPr>
+      <p:grpSpPr>
+        <a:xfrm>
+          <a:off x="0" y="0"/>
+          <a:ext cx="0" cy="0"/>
+          <a:chOff x="0" y="0"/>
+          <a:chExt cx="0" cy="0"/>
+        </a:xfrm>
+      </p:grpSpPr>
+      <p:sp>
+        <p:nvSpPr>
+          <p:cNvPr id="3" name="Text 0"/>
+          <p:cNvSpPr/>
+          <p:nvPr/>
+        </p:nvSpPr>
+        <p:spPr>
+          <a:xfrm>
+            <a:off x="10637215" y="384048"/>
+            <a:ext cx="731520" cy="365760"/>
+          </a:xfrm>
+          <a:prstGeom prst="rect">
+            <a:avLst/>
+          </a:prstGeom>
+          <a:noFill/>
+          <a:ln/>
+        </p:spPr>
+        <p:txBody>
+          <a:bodyPr wrap="square" lIns="0" tIns="0" rIns="0" bIns="0" rtlCol="0" anchor="ctr"/>
+          <a:lstStyle/>
+          <a:p>
+            <a:pPr algn="r" indent="0" marL="0">
+              <a:buNone/>
+            </a:pPr>
+            <a:r>
+              <a:rPr lang="en-US" sz="1200" b="1" spc="300" kern="0" dirty="0">
+                <a:solidFill>
+                  <a:srgbClr val="A9A79F"/>
+                </a:solidFill>
+                <a:latin typeface="Arial" pitchFamily="34" charset="0"/>
+                <a:ea typeface="Arial" pitchFamily="34" charset="-122"/>
+                <a:cs typeface="Arial" pitchFamily="34" charset="-120"/>
+              </a:rPr>
+              <a:t>EPI</a:t>
+            </a:r>
+            <a:endParaRPr lang="en-US" sz="1200" dirty="0"/>
+          </a:p>
+        </p:txBody>
+      </p:sp>
+      <p:sp>
+        <p:nvSpPr>
+          <p:cNvPr id="4" name="Text 1"/>
+          <p:cNvSpPr/>
+          <p:nvPr/>
+        </p:nvSpPr>
+        <p:spPr>
+          <a:xfrm>
+            <a:off x="822960" y="6400800"/>
+            <a:ext cx="9631375" cy="274320"/>
+          </a:xfrm>
+          <a:prstGeom prst="rect">
+            <a:avLst/>
+          </a:prstGeom>
+          <a:noFill/>
+          <a:ln/>
+        </p:spPr>
+        <p:txBody>
+          <a:bodyPr wrap="square" lIns="0" tIns="0" rIns="0" bIns="0" rtlCol="0" anchor="ctr"/>
+          <a:lstStyle/>
+          <a:p>
+            <a:pPr indent="0" marL="0">
+              <a:buNone/>
+            </a:pPr>
+            <a:r>
+              <a:rPr lang="en-US" sz="1000" dirty="0">
+                <a:solidFill>
+                  <a:srgbClr val="A9A79F"/>
+                </a:solidFill>
+                <a:latin typeface="Arial" pitchFamily="34" charset="0"/>
+                <a:ea typeface="Arial" pitchFamily="34" charset="-122"/>
+                <a:cs typeface="Arial" pitchFamily="34" charset="-120"/>
+              </a:rPr>
+              <a:t>Lição M9-F04, Uma visita à Casa dos Bicos</a:t>
+            </a:r>
+            <a:endParaRPr lang="en-US" sz="1000" dirty="0"/>
+          </a:p>
+        </p:txBody>
+      </p:sp>
+      <p:sp>
+        <p:nvSpPr>
+          <p:cNvPr id="5" name="Text 2"/>
+          <p:cNvSpPr/>
+          <p:nvPr/>
+        </p:nvSpPr>
+        <p:spPr>
+          <a:xfrm>
+            <a:off x="10637215" y="6400800"/>
+            <a:ext cx="731520" cy="274320"/>
+          </a:xfrm>
+          <a:prstGeom prst="rect">
+            <a:avLst/>
+          </a:prstGeom>
+          <a:noFill/>
+          <a:ln/>
+        </p:spPr>
+        <p:txBody>
+          <a:bodyPr wrap="square" lIns="0" tIns="0" rIns="0" bIns="0" rtlCol="0" anchor="ctr"/>
+          <a:lstStyle/>
+          <a:p>
+            <a:pPr algn="r" indent="0" marL="0">
+              <a:buNone/>
+            </a:pPr>
+            <a:r>
+              <a:rPr lang="en-US" sz="1000" dirty="0">
+                <a:solidFill>
+                  <a:srgbClr val="A9A79F"/>
+                </a:solidFill>
+                <a:latin typeface="Arial" pitchFamily="34" charset="0"/>
+                <a:ea typeface="Arial" pitchFamily="34" charset="-122"/>
+                <a:cs typeface="Arial" pitchFamily="34" charset="-120"/>
+              </a:rPr>
+              <a:t>10</a:t>
+            </a:r>
+            <a:endParaRPr lang="en-US" sz="1000" dirty="0"/>
+          </a:p>
+        </p:txBody>
+      </p:sp>
+      <p:sp>
+        <p:nvSpPr>
+          <p:cNvPr id="6" name="Shape 3"/>
+          <p:cNvSpPr/>
+          <p:nvPr/>
+        </p:nvSpPr>
+        <p:spPr>
+          <a:xfrm>
+            <a:off x="822960" y="502920"/>
+            <a:ext cx="201168" cy="201168"/>
+          </a:xfrm>
+          <a:prstGeom prst="triangle">
+            <a:avLst/>
+          </a:prstGeom>
+          <a:ln w="19050">
+            <a:solidFill>
+              <a:srgbClr val="F2F0EA"/>
+            </a:solidFill>
+            <a:prstDash val="solid"/>
+          </a:ln>
+        </p:spPr>
+      </p:sp>
+      <p:sp>
+        <p:nvSpPr>
+          <p:cNvPr id="7" name="Text 4"/>
+          <p:cNvSpPr/>
+          <p:nvPr/>
+        </p:nvSpPr>
+        <p:spPr>
+          <a:xfrm>
+            <a:off x="1188720" y="457200"/>
+            <a:ext cx="9448495" cy="292608"/>
+          </a:xfrm>
+          <a:prstGeom prst="rect">
+            <a:avLst/>
+          </a:prstGeom>
+          <a:noFill/>
+          <a:ln/>
+        </p:spPr>
+        <p:txBody>
+          <a:bodyPr wrap="square" lIns="0" tIns="0" rIns="0" bIns="0" rtlCol="0" anchor="ctr"/>
+          <a:lstStyle/>
+          <a:p>
+            <a:pPr indent="0" marL="0">
+              <a:buNone/>
+            </a:pPr>
+            <a:r>
+              <a:rPr lang="en-US" sz="1100" b="1" spc="250" kern="0" dirty="0">
+                <a:solidFill>
+                  <a:srgbClr val="A9A79F"/>
+                </a:solidFill>
+                <a:latin typeface="Arial" pitchFamily="34" charset="0"/>
+                <a:ea typeface="Arial" pitchFamily="34" charset="-122"/>
+                <a:cs typeface="Arial" pitchFamily="34" charset="-120"/>
+              </a:rPr>
+              <a:t>ATÉ À PRÓXIMA AULA</a:t>
+            </a:r>
+            <a:endParaRPr lang="en-US" sz="1100" dirty="0"/>
+          </a:p>
+        </p:txBody>
+      </p:sp>
+      <p:sp>
+        <p:nvSpPr>
+          <p:cNvPr id="8" name="Text 5"/>
+          <p:cNvSpPr/>
+          <p:nvPr/>
+        </p:nvSpPr>
+        <p:spPr>
+          <a:xfrm>
+            <a:off x="822960" y="868680"/>
+            <a:ext cx="7071055" cy="1188720"/>
+          </a:xfrm>
+          <a:prstGeom prst="rect">
+            <a:avLst/>
+          </a:prstGeom>
+          <a:noFill/>
+          <a:ln/>
+        </p:spPr>
+        <p:txBody>
+          <a:bodyPr wrap="square" lIns="0" tIns="0" rIns="0" bIns="0" rtlCol="0" anchor="b">
+            <a:normAutofit/>
+          </a:bodyPr>
+          <a:lstStyle/>
+          <a:p>
+            <a:pPr indent="0" marL="0">
+              <a:buNone/>
+            </a:pPr>
+            <a:r>
+              <a:rPr lang="en-US" sz="3000" dirty="0">
+                <a:solidFill>
+                  <a:srgbClr val="F2F0EA"/>
+                </a:solidFill>
+                <a:latin typeface="Arial" pitchFamily="34" charset="0"/>
+                <a:ea typeface="Arial" pitchFamily="34" charset="-122"/>
+                <a:cs typeface="Arial" pitchFamily="34" charset="-120"/>
+              </a:rPr>
+              <a:t>No telemóvel ou no PC da escola</a:t>
+            </a:r>
+            <a:endParaRPr lang="en-US" sz="3000" dirty="0"/>
+          </a:p>
+        </p:txBody>
+      </p:sp>
+      <p:sp>
+        <p:nvSpPr>
+          <p:cNvPr id="9" name="Shape 6"/>
+          <p:cNvSpPr/>
+          <p:nvPr/>
+        </p:nvSpPr>
+        <p:spPr>
+          <a:xfrm>
+            <a:off x="822960" y="2121408"/>
+            <a:ext cx="640080" cy="64008"/>
+          </a:xfrm>
+          <a:prstGeom prst="rect">
+            <a:avLst/>
+          </a:prstGeom>
+          <a:solidFill>
+            <a:srgbClr val="E4555C"/>
+          </a:solidFill>
+          <a:ln w="12700">
+            <a:solidFill>
+              <a:srgbClr val="E4555C"/>
+            </a:solidFill>
+            <a:prstDash val="solid"/>
+          </a:ln>
+        </p:spPr>
+      </p:sp>
+      <p:sp>
+        <p:nvSpPr>
+          <p:cNvPr id="10" name="Shape 7"/>
+          <p:cNvSpPr/>
+          <p:nvPr/>
+        </p:nvSpPr>
+        <p:spPr>
+          <a:xfrm>
+            <a:off x="1005840" y="2606040"/>
+            <a:ext cx="0" cy="1424940"/>
+          </a:xfrm>
+          <a:prstGeom prst="line">
+            <a:avLst/>
+          </a:prstGeom>
+          <a:noFill/>
+          <a:ln w="12700">
+            <a:solidFill>
+              <a:srgbClr val="A9A79F"/>
+            </a:solidFill>
+            <a:prstDash val="solid"/>
+          </a:ln>
+        </p:spPr>
+      </p:sp>
+      <p:sp>
+        <p:nvSpPr>
+          <p:cNvPr id="11" name="Shape 8"/>
+          <p:cNvSpPr/>
+          <p:nvPr/>
+        </p:nvSpPr>
+        <p:spPr>
+          <a:xfrm>
+            <a:off x="822960" y="2423160"/>
+            <a:ext cx="365760" cy="365760"/>
+          </a:xfrm>
+          <a:prstGeom prst="ellipse">
+            <a:avLst/>
+          </a:prstGeom>
+          <a:solidFill>
+            <a:srgbClr val="111111"/>
+          </a:solidFill>
+          <a:ln w="15875">
+            <a:solidFill>
+              <a:srgbClr val="F2F0EA"/>
+            </a:solidFill>
+            <a:prstDash val="solid"/>
+          </a:ln>
+        </p:spPr>
+      </p:sp>
+      <p:sp>
+        <p:nvSpPr>
+          <p:cNvPr id="12" name="Text 9"/>
+          <p:cNvSpPr/>
+          <p:nvPr/>
+        </p:nvSpPr>
+        <p:spPr>
+          <a:xfrm>
+            <a:off x="822960" y="2423160"/>
+            <a:ext cx="365760" cy="365760"/>
+          </a:xfrm>
+          <a:prstGeom prst="rect">
+            <a:avLst/>
+          </a:prstGeom>
+          <a:noFill/>
+          <a:ln/>
+        </p:spPr>
+        <p:txBody>
+          <a:bodyPr wrap="square" lIns="0" tIns="0" rIns="0" bIns="0" rtlCol="0" anchor="ctr"/>
+          <a:lstStyle/>
+          <a:p>
+            <a:pPr algn="ctr" indent="0" marL="0">
+              <a:buNone/>
+            </a:pPr>
+            <a:r>
+              <a:rPr lang="en-US" sz="1300" b="1" dirty="0">
+                <a:solidFill>
+                  <a:srgbClr val="F2F0EA"/>
+                </a:solidFill>
+                <a:latin typeface="Arial" pitchFamily="34" charset="0"/>
+                <a:ea typeface="Arial" pitchFamily="34" charset="-122"/>
+                <a:cs typeface="Arial" pitchFamily="34" charset="-120"/>
+              </a:rPr>
+              <a:t>1</a:t>
+            </a:r>
+            <a:endParaRPr lang="en-US" sz="1300" dirty="0"/>
+          </a:p>
+        </p:txBody>
+      </p:sp>
+      <p:sp>
+        <p:nvSpPr>
+          <p:cNvPr id="13" name="Text 10"/>
+          <p:cNvSpPr/>
+          <p:nvPr/>
+        </p:nvSpPr>
+        <p:spPr>
+          <a:xfrm>
+            <a:off x="1417320" y="2432304"/>
+            <a:ext cx="6430975" cy="542036"/>
+          </a:xfrm>
+          <a:prstGeom prst="rect">
+            <a:avLst/>
+          </a:prstGeom>
+          <a:noFill/>
+          <a:ln/>
+        </p:spPr>
+        <p:txBody>
+          <a:bodyPr wrap="square" lIns="0" tIns="0" rIns="0" bIns="0" rtlCol="0" anchor="t">
+            <a:normAutofit/>
+          </a:bodyPr>
+          <a:lstStyle/>
+          <a:p>
+            <a:pPr indent="0" marL="0">
+              <a:lnSpc>
+                <a:spcPct val="105000"/>
+              </a:lnSpc>
+              <a:buNone/>
+            </a:pPr>
+            <a:r>
+              <a:rPr lang="en-US" sz="2200" dirty="0">
+                <a:solidFill>
+                  <a:srgbClr val="F2F0EA"/>
+                </a:solidFill>
+                <a:latin typeface="Arial" pitchFamily="34" charset="0"/>
+                <a:ea typeface="Arial" pitchFamily="34" charset="-122"/>
+                <a:cs typeface="Arial" pitchFamily="34" charset="-120"/>
+              </a:rPr>
+              <a:t>Termina o baralho da lição M9-F04</a:t>
+            </a:r>
+            <a:endParaRPr lang="en-US" sz="2200" dirty="0"/>
+          </a:p>
+        </p:txBody>
+      </p:sp>
+      <p:sp>
+        <p:nvSpPr>
+          <p:cNvPr id="14" name="Shape 11"/>
+          <p:cNvSpPr/>
+          <p:nvPr/>
+        </p:nvSpPr>
+        <p:spPr>
+          <a:xfrm>
+            <a:off x="822960" y="2965196"/>
+            <a:ext cx="365760" cy="365760"/>
+          </a:xfrm>
+          <a:prstGeom prst="ellipse">
+            <a:avLst/>
+          </a:prstGeom>
+          <a:solidFill>
+            <a:srgbClr val="111111"/>
+          </a:solidFill>
+          <a:ln w="15875">
+            <a:solidFill>
+              <a:srgbClr val="F2F0EA"/>
+            </a:solidFill>
+            <a:prstDash val="solid"/>
+          </a:ln>
+        </p:spPr>
+      </p:sp>
+      <p:sp>
+        <p:nvSpPr>
+          <p:cNvPr id="15" name="Text 12"/>
+          <p:cNvSpPr/>
+          <p:nvPr/>
+        </p:nvSpPr>
+        <p:spPr>
+          <a:xfrm>
+            <a:off x="822960" y="2965196"/>
+            <a:ext cx="365760" cy="365760"/>
+          </a:xfrm>
+          <a:prstGeom prst="rect">
+            <a:avLst/>
+          </a:prstGeom>
+          <a:noFill/>
+          <a:ln/>
+        </p:spPr>
+        <p:txBody>
+          <a:bodyPr wrap="square" lIns="0" tIns="0" rIns="0" bIns="0" rtlCol="0" anchor="ctr"/>
+          <a:lstStyle/>
+          <a:p>
+            <a:pPr algn="ctr" indent="0" marL="0">
+              <a:buNone/>
+            </a:pPr>
+            <a:r>
+              <a:rPr lang="en-US" sz="1300" b="1" dirty="0">
+                <a:solidFill>
+                  <a:srgbClr val="F2F0EA"/>
+                </a:solidFill>
+                <a:latin typeface="Arial" pitchFamily="34" charset="0"/>
+                <a:ea typeface="Arial" pitchFamily="34" charset="-122"/>
+                <a:cs typeface="Arial" pitchFamily="34" charset="-120"/>
+              </a:rPr>
+              <a:t>2</a:t>
+            </a:r>
+            <a:endParaRPr lang="en-US" sz="1300" dirty="0"/>
+          </a:p>
+        </p:txBody>
+      </p:sp>
+      <p:sp>
+        <p:nvSpPr>
+          <p:cNvPr id="16" name="Text 13"/>
+          <p:cNvSpPr/>
+          <p:nvPr/>
+        </p:nvSpPr>
+        <p:spPr>
+          <a:xfrm>
+            <a:off x="1417320" y="2974340"/>
+            <a:ext cx="6430975" cy="882904"/>
+          </a:xfrm>
+          <a:prstGeom prst="rect">
+            <a:avLst/>
+          </a:prstGeom>
+          <a:noFill/>
+          <a:ln/>
+        </p:spPr>
+        <p:txBody>
+          <a:bodyPr wrap="square" lIns="0" tIns="0" rIns="0" bIns="0" rtlCol="0" anchor="t">
+            <a:normAutofit/>
+          </a:bodyPr>
+          <a:lstStyle/>
+          <a:p>
+            <a:pPr indent="0" marL="0">
+              <a:lnSpc>
+                <a:spcPct val="105000"/>
+              </a:lnSpc>
+              <a:buNone/>
+            </a:pPr>
+            <a:r>
+              <a:rPr lang="en-US" sz="2200" dirty="0">
+                <a:solidFill>
+                  <a:srgbClr val="F2F0EA"/>
+                </a:solidFill>
+                <a:latin typeface="Arial" pitchFamily="34" charset="0"/>
+                <a:ea typeface="Arial" pitchFamily="34" charset="-122"/>
+                <a:cs typeface="Arial" pitchFamily="34" charset="-120"/>
+              </a:rPr>
+              <a:t>Espreita a lição seguinte, «De quem é uma obra?»</a:t>
+            </a:r>
+            <a:endParaRPr lang="en-US" sz="2200" dirty="0"/>
+          </a:p>
+        </p:txBody>
+      </p:sp>
+      <p:sp>
+        <p:nvSpPr>
+          <p:cNvPr id="17" name="Shape 14"/>
+          <p:cNvSpPr/>
+          <p:nvPr/>
+        </p:nvSpPr>
+        <p:spPr>
+          <a:xfrm>
+            <a:off x="822960" y="3848100"/>
+            <a:ext cx="365760" cy="365760"/>
+          </a:xfrm>
+          <a:prstGeom prst="ellipse">
+            <a:avLst/>
+          </a:prstGeom>
+          <a:solidFill>
+            <a:srgbClr val="111111"/>
+          </a:solidFill>
+          <a:ln w="15875">
+            <a:solidFill>
+              <a:srgbClr val="F2F0EA"/>
+            </a:solidFill>
+            <a:prstDash val="solid"/>
+          </a:ln>
+        </p:spPr>
+      </p:sp>
+      <p:sp>
+        <p:nvSpPr>
+          <p:cNvPr id="18" name="Text 15"/>
+          <p:cNvSpPr/>
+          <p:nvPr/>
+        </p:nvSpPr>
+        <p:spPr>
+          <a:xfrm>
+            <a:off x="822960" y="3848100"/>
+            <a:ext cx="365760" cy="365760"/>
+          </a:xfrm>
+          <a:prstGeom prst="rect">
+            <a:avLst/>
+          </a:prstGeom>
+          <a:noFill/>
+          <a:ln/>
+        </p:spPr>
+        <p:txBody>
+          <a:bodyPr wrap="square" lIns="0" tIns="0" rIns="0" bIns="0" rtlCol="0" anchor="ctr"/>
+          <a:lstStyle/>
+          <a:p>
+            <a:pPr algn="ctr" indent="0" marL="0">
+              <a:buNone/>
+            </a:pPr>
+            <a:r>
+              <a:rPr lang="en-US" sz="1300" b="1" dirty="0">
+                <a:solidFill>
+                  <a:srgbClr val="F2F0EA"/>
+                </a:solidFill>
+                <a:latin typeface="Arial" pitchFamily="34" charset="0"/>
+                <a:ea typeface="Arial" pitchFamily="34" charset="-122"/>
+                <a:cs typeface="Arial" pitchFamily="34" charset="-120"/>
+              </a:rPr>
+              <a:t>3</a:t>
+            </a:r>
+            <a:endParaRPr lang="en-US" sz="1300" dirty="0"/>
+          </a:p>
+        </p:txBody>
+      </p:sp>
+      <p:sp>
+        <p:nvSpPr>
+          <p:cNvPr id="19" name="Text 16"/>
+          <p:cNvSpPr/>
+          <p:nvPr/>
+        </p:nvSpPr>
+        <p:spPr>
+          <a:xfrm>
+            <a:off x="1417320" y="3857244"/>
+            <a:ext cx="6430975" cy="882904"/>
+          </a:xfrm>
+          <a:prstGeom prst="rect">
+            <a:avLst/>
+          </a:prstGeom>
+          <a:noFill/>
+          <a:ln/>
+        </p:spPr>
+        <p:txBody>
+          <a:bodyPr wrap="square" lIns="0" tIns="0" rIns="0" bIns="0" rtlCol="0" anchor="t">
+            <a:normAutofit/>
+          </a:bodyPr>
+          <a:lstStyle/>
+          <a:p>
+            <a:pPr indent="0" marL="0">
+              <a:lnSpc>
+                <a:spcPct val="105000"/>
+              </a:lnSpc>
+              <a:buNone/>
+            </a:pPr>
+            <a:r>
+              <a:rPr lang="en-US" sz="2200" dirty="0">
+                <a:solidFill>
+                  <a:srgbClr val="F2F0EA"/>
+                </a:solidFill>
+                <a:latin typeface="Arial" pitchFamily="34" charset="0"/>
+                <a:ea typeface="Arial" pitchFamily="34" charset="-122"/>
+                <a:cs typeface="Arial" pitchFamily="34" charset="-120"/>
+              </a:rPr>
+              <a:t>Antes de sair: foto do caderno para o portefólio</a:t>
+            </a:r>
+            <a:endParaRPr lang="en-US" sz="2200" dirty="0"/>
+          </a:p>
+        </p:txBody>
+      </p:sp>
+      <p:sp>
+        <p:nvSpPr>
+          <p:cNvPr id="20" name="Shape 17"/>
+          <p:cNvSpPr/>
+          <p:nvPr/>
+        </p:nvSpPr>
+        <p:spPr>
+          <a:xfrm>
+            <a:off x="8332927" y="1033272"/>
+            <a:ext cx="3145536" cy="3145536"/>
+          </a:xfrm>
+          <a:prstGeom prst="rect">
+            <a:avLst/>
+          </a:prstGeom>
+          <a:solidFill>
+            <a:srgbClr val="FFFFFF"/>
+          </a:solidFill>
+          <a:ln w="12700">
+            <a:solidFill>
+              <a:srgbClr val="F2F0EA"/>
+            </a:solidFill>
+            <a:prstDash val="solid"/>
+          </a:ln>
+        </p:spPr>
+      </p:sp>
+      <p:pic>
+        <p:nvPicPr>
+          <p:cNvPr id="21" name="Image 0" descr="/home/user/epi-portugues-fontes/_interno/biblioteca-imagens/qr/passo-m9-f04.png">    </p:cNvPr>
+          <p:cNvPicPr>
+            <a:picLocks noChangeAspect="1"/>
+          </p:cNvPicPr>
+          <p:nvPr/>
+        </p:nvPicPr>
+        <p:blipFill>
+          <a:blip r:embed="rId1"/>
+          <a:stretch>
+            <a:fillRect/>
+          </a:stretch>
+        </p:blipFill>
+        <p:spPr>
+          <a:xfrm>
+            <a:off x="8442655" y="1143000"/>
+            <a:ext cx="2926080" cy="2926080"/>
+          </a:xfrm>
+          <a:prstGeom prst="rect">
+            <a:avLst/>
+          </a:prstGeom>
+        </p:spPr>
+      </p:pic>
+      <p:sp>
+        <p:nvSpPr>
+          <p:cNvPr id="22" name="Text 18"/>
+          <p:cNvSpPr/>
+          <p:nvPr/>
+        </p:nvSpPr>
+        <p:spPr>
+          <a:xfrm>
+            <a:off x="8332927" y="4343400"/>
+            <a:ext cx="3145536" cy="640080"/>
+          </a:xfrm>
+          <a:prstGeom prst="rect">
+            <a:avLst/>
+          </a:prstGeom>
+          <a:noFill/>
+          <a:ln/>
+        </p:spPr>
+        <p:txBody>
+          <a:bodyPr wrap="square" lIns="0" tIns="0" rIns="0" bIns="0" rtlCol="0" anchor="t">
+            <a:normAutofit/>
+          </a:bodyPr>
+          <a:lstStyle/>
+          <a:p>
+            <a:pPr algn="ctr" indent="0" marL="0">
+              <a:buNone/>
+            </a:pPr>
+            <a:r>
+              <a:rPr lang="en-US" sz="1200" dirty="0">
+                <a:solidFill>
+                  <a:srgbClr val="F2F0EA"/>
+                </a:solidFill>
+                <a:latin typeface="Arial" pitchFamily="34" charset="0"/>
+                <a:ea typeface="Arial" pitchFamily="34" charset="-122"/>
+                <a:cs typeface="Arial" pitchFamily="34" charset="-120"/>
+              </a:rPr>
+              <a:t>pedrohfernandes-klk.github.io/​pt/​m9/​</a:t>
+            </a:r>
+            <a:endParaRPr lang="en-US" sz="1200" dirty="0"/>
           </a:p>
         </p:txBody>
       </p:sp>
@@ -5184,7 +5898,7 @@
                 <a:ea typeface="Arial" pitchFamily="34" charset="-122"/>
                 <a:cs typeface="Arial" pitchFamily="34" charset="-120"/>
               </a:rPr>
-              <a:t>SÍNTESE</a:t>
+              <a:t>NO ATLAS LUSÓFONO (OPCIONAL)</a:t>
             </a:r>
             <a:endParaRPr lang="en-US" sz="1100" dirty="0"/>
           </a:p>
@@ -5225,7 +5939,7 @@
                 <a:ea typeface="Arial" pitchFamily="34" charset="-122"/>
                 <a:cs typeface="Arial" pitchFamily="34" charset="-120"/>
               </a:rPr>
-              <a:t>Para fixar</a:t>
+              <a:t>Jorge Amado, Brasil</a:t>
             </a:r>
             <a:endParaRPr lang="en-US" sz="3400" dirty="0"/>
           </a:p>
@@ -5258,101 +5972,14 @@
       </p:sp>
       <p:sp>
         <p:nvSpPr>
-          <p:cNvPr id="10" name="Shape 7"/>
-          <p:cNvSpPr/>
-          <p:nvPr/>
-        </p:nvSpPr>
-        <p:spPr>
-          <a:xfrm>
-            <a:off x="1005840" y="2286000"/>
-            <a:ext cx="0" cy="2788412"/>
-          </a:xfrm>
-          <a:prstGeom prst="line">
-            <a:avLst/>
-          </a:prstGeom>
-          <a:noFill/>
-          <a:ln w="12700">
-            <a:solidFill>
-              <a:srgbClr val="A9A79F"/>
-            </a:solidFill>
-            <a:prstDash val="solid"/>
-          </a:ln>
-        </p:spPr>
-      </p:sp>
-      <p:sp>
-        <p:nvSpPr>
-          <p:cNvPr id="11" name="Shape 8"/>
-          <p:cNvSpPr/>
-          <p:nvPr/>
-        </p:nvSpPr>
-        <p:spPr>
-          <a:xfrm>
-            <a:off x="822960" y="2103120"/>
-            <a:ext cx="365760" cy="365760"/>
-          </a:xfrm>
-          <a:prstGeom prst="ellipse">
-            <a:avLst/>
-          </a:prstGeom>
-          <a:solidFill>
-            <a:srgbClr val="111111"/>
-          </a:solidFill>
-          <a:ln w="15875">
-            <a:solidFill>
-              <a:srgbClr val="F2F0EA"/>
-            </a:solidFill>
-            <a:prstDash val="solid"/>
-          </a:ln>
-        </p:spPr>
-      </p:sp>
-      <p:sp>
-        <p:nvSpPr>
-          <p:cNvPr id="12" name="Text 9"/>
-          <p:cNvSpPr/>
-          <p:nvPr/>
-        </p:nvSpPr>
-        <p:spPr>
-          <a:xfrm>
-            <a:off x="822960" y="2103120"/>
-            <a:ext cx="365760" cy="365760"/>
-          </a:xfrm>
-          <a:prstGeom prst="rect">
-            <a:avLst/>
-          </a:prstGeom>
-          <a:noFill/>
-          <a:ln/>
-        </p:spPr>
-        <p:txBody>
-          <a:bodyPr wrap="square" lIns="0" tIns="0" rIns="0" bIns="0" rtlCol="0" anchor="ctr"/>
-          <a:lstStyle/>
-          <a:p>
-            <a:pPr algn="ctr" indent="0" marL="0">
-              <a:buNone/>
-            </a:pPr>
-            <a:r>
-              <a:rPr lang="en-US" sz="1300" b="1" dirty="0">
-                <a:solidFill>
-                  <a:srgbClr val="F2F0EA"/>
-                </a:solidFill>
-                <a:latin typeface="Arial" pitchFamily="34" charset="0"/>
-                <a:ea typeface="Arial" pitchFamily="34" charset="-122"/>
-                <a:cs typeface="Arial" pitchFamily="34" charset="-120"/>
-              </a:rPr>
-              <a:t>1</a:t>
-            </a:r>
-            <a:endParaRPr lang="en-US" sz="1300" dirty="0"/>
-          </a:p>
-        </p:txBody>
-      </p:sp>
-      <p:sp>
-        <p:nvSpPr>
-          <p:cNvPr id="13" name="Text 10"/>
-          <p:cNvSpPr/>
-          <p:nvPr/>
-        </p:nvSpPr>
-        <p:spPr>
-          <a:xfrm>
-            <a:off x="1417320" y="2112264"/>
-            <a:ext cx="9174175" cy="1564640"/>
+          <p:cNvPr id="10" name="Text 7"/>
+          <p:cNvSpPr/>
+          <p:nvPr/>
+        </p:nvSpPr>
+        <p:spPr>
+          <a:xfrm>
+            <a:off x="822960" y="2057400"/>
+            <a:ext cx="9814255" cy="4023360"/>
           </a:xfrm>
           <a:prstGeom prst="rect">
             <a:avLst/>
@@ -5368,272 +5995,65 @@
           <a:p>
             <a:pPr indent="0" marL="0">
               <a:lnSpc>
-                <a:spcPct val="105000"/>
+                <a:spcPct val="110000"/>
               </a:lnSpc>
-              <a:buNone/>
-            </a:pPr>
-            <a:r>
-              <a:rPr lang="en-US" sz="2200" dirty="0">
+              <a:spcAft>
+                <a:spcPts val="1400"/>
+              </a:spcAft>
+              <a:buNone/>
+            </a:pPr>
+            <a:r>
+              <a:rPr lang="en-US" sz="2800" dirty="0">
                 <a:solidFill>
                   <a:srgbClr val="F2F0EA"/>
                 </a:solidFill>
-                <a:latin typeface="Arial" pitchFamily="34" charset="0"/>
-                <a:ea typeface="Arial" pitchFamily="34" charset="-122"/>
-                <a:cs typeface="Arial" pitchFamily="34" charset="-120"/>
-              </a:rPr>
-              <a:t>Nos itens situaste o lugar: a Casa dos Bicos fica a oriente do Terreiro do Paço, vai-se a pé desde o Cais do Sodré e a exposição permanente chama-se «A semente e os frutos».</a:t>
-            </a:r>
-            <a:endParaRPr lang="en-US" sz="2200" dirty="0"/>
-          </a:p>
-        </p:txBody>
-      </p:sp>
-      <p:sp>
-        <p:nvSpPr>
-          <p:cNvPr id="14" name="Shape 11"/>
-          <p:cNvSpPr/>
-          <p:nvPr/>
-        </p:nvSpPr>
-        <p:spPr>
-          <a:xfrm>
-            <a:off x="822960" y="3667760"/>
-            <a:ext cx="365760" cy="365760"/>
-          </a:xfrm>
-          <a:prstGeom prst="ellipse">
-            <a:avLst/>
-          </a:prstGeom>
-          <a:solidFill>
-            <a:srgbClr val="111111"/>
-          </a:solidFill>
-          <a:ln w="15875">
-            <a:solidFill>
-              <a:srgbClr val="F2F0EA"/>
-            </a:solidFill>
-            <a:prstDash val="solid"/>
-          </a:ln>
-        </p:spPr>
-      </p:sp>
-      <p:sp>
-        <p:nvSpPr>
-          <p:cNvPr id="15" name="Text 12"/>
-          <p:cNvSpPr/>
-          <p:nvPr/>
-        </p:nvSpPr>
-        <p:spPr>
-          <a:xfrm>
-            <a:off x="822960" y="3667760"/>
-            <a:ext cx="365760" cy="365760"/>
-          </a:xfrm>
-          <a:prstGeom prst="rect">
-            <a:avLst/>
-          </a:prstGeom>
-          <a:noFill/>
-          <a:ln/>
-        </p:spPr>
-        <p:txBody>
-          <a:bodyPr wrap="square" lIns="0" tIns="0" rIns="0" bIns="0" rtlCol="0" anchor="ctr"/>
-          <a:lstStyle/>
-          <a:p>
-            <a:pPr algn="ctr" indent="0" marL="0">
-              <a:buNone/>
-            </a:pPr>
-            <a:r>
-              <a:rPr lang="en-US" sz="1300" b="1" dirty="0">
-                <a:solidFill>
-                  <a:srgbClr val="F2F0EA"/>
-                </a:solidFill>
-                <a:latin typeface="Arial" pitchFamily="34" charset="0"/>
-                <a:ea typeface="Arial" pitchFamily="34" charset="-122"/>
-                <a:cs typeface="Arial" pitchFamily="34" charset="-120"/>
-              </a:rPr>
-              <a:t>2</a:t>
-            </a:r>
-            <a:endParaRPr lang="en-US" sz="1300" dirty="0"/>
-          </a:p>
-        </p:txBody>
-      </p:sp>
-      <p:sp>
-        <p:nvSpPr>
-          <p:cNvPr id="16" name="Text 13"/>
-          <p:cNvSpPr/>
-          <p:nvPr/>
-        </p:nvSpPr>
-        <p:spPr>
-          <a:xfrm>
-            <a:off x="1417320" y="3676904"/>
-            <a:ext cx="9174175" cy="1223772"/>
-          </a:xfrm>
-          <a:prstGeom prst="rect">
-            <a:avLst/>
-          </a:prstGeom>
-          <a:noFill/>
-          <a:ln/>
-        </p:spPr>
-        <p:txBody>
-          <a:bodyPr wrap="square" lIns="0" tIns="0" rIns="0" bIns="0" rtlCol="0" anchor="t">
-            <a:normAutofit/>
-          </a:bodyPr>
-          <a:lstStyle/>
-          <a:p>
+                <a:latin typeface="Georgia" pitchFamily="34" charset="0"/>
+                <a:ea typeface="Georgia" pitchFamily="34" charset="-122"/>
+                <a:cs typeface="Georgia" pitchFamily="34" charset="-120"/>
+              </a:rPr>
+              <a:t>Jorge Amado e José Saramago foram amigos e trocaram cartas, reunidas em 2017 no livro </a:t>
+            </a:r>
             <a:pPr indent="0" marL="0">
               <a:lnSpc>
-                <a:spcPct val="105000"/>
+                <a:spcPct val="110000"/>
               </a:lnSpc>
-              <a:buNone/>
-            </a:pPr>
-            <a:r>
-              <a:rPr lang="en-US" sz="2200" dirty="0">
+              <a:spcAft>
+                <a:spcPts val="1400"/>
+              </a:spcAft>
+              <a:buNone/>
+            </a:pPr>
+            <a:r>
+              <a:rPr lang="en-US" sz="2800" i="1" dirty="0">
                 <a:solidFill>
                   <a:srgbClr val="F2F0EA"/>
                 </a:solidFill>
-                <a:latin typeface="Arial" pitchFamily="34" charset="0"/>
-                <a:ea typeface="Arial" pitchFamily="34" charset="-122"/>
-                <a:cs typeface="Arial" pitchFamily="34" charset="-120"/>
-              </a:rPr>
-              <a:t>No caderno de campo, primeiro observas e registas com fonte, e só depois ligas ao </a:t>
+                <a:latin typeface="Georgia" pitchFamily="34" charset="0"/>
+                <a:ea typeface="Georgia" pitchFamily="34" charset="-122"/>
+                <a:cs typeface="Georgia" pitchFamily="34" charset="-120"/>
+              </a:rPr>
+              <a:t>Com o Mar por Meio: uma amizade em cartas</a:t>
             </a:r>
             <a:pPr indent="0" marL="0">
               <a:lnSpc>
-                <a:spcPct val="105000"/>
+                <a:spcPct val="110000"/>
               </a:lnSpc>
-              <a:buNone/>
-            </a:pPr>
-            <a:r>
-              <a:rPr lang="en-US" sz="2200" i="1" dirty="0">
+              <a:spcAft>
+                <a:spcPts val="1400"/>
+              </a:spcAft>
+              <a:buNone/>
+            </a:pPr>
+            <a:r>
+              <a:rPr lang="en-US" sz="2800" dirty="0">
                 <a:solidFill>
                   <a:srgbClr val="F2F0EA"/>
                 </a:solidFill>
-                <a:latin typeface="Arial" pitchFamily="34" charset="0"/>
-                <a:ea typeface="Arial" pitchFamily="34" charset="-122"/>
-                <a:cs typeface="Arial" pitchFamily="34" charset="-120"/>
-              </a:rPr>
-              <a:t>Memorial</a:t>
-            </a:r>
-            <a:pPr indent="0" marL="0">
-              <a:lnSpc>
-                <a:spcPct val="105000"/>
-              </a:lnSpc>
-              <a:buNone/>
-            </a:pPr>
-            <a:r>
-              <a:rPr lang="en-US" sz="2200" dirty="0">
-                <a:solidFill>
-                  <a:srgbClr val="F2F0EA"/>
-                </a:solidFill>
-                <a:latin typeface="Arial" pitchFamily="34" charset="0"/>
-                <a:ea typeface="Arial" pitchFamily="34" charset="-122"/>
-                <a:cs typeface="Arial" pitchFamily="34" charset="-120"/>
-              </a:rPr>
-              <a:t>; um dado biográfico novo é um facto da vida de Saramago que ainda não sabias.</a:t>
-            </a:r>
-            <a:endParaRPr lang="en-US" sz="2200" dirty="0"/>
-          </a:p>
-        </p:txBody>
-      </p:sp>
-      <p:sp>
-        <p:nvSpPr>
-          <p:cNvPr id="17" name="Shape 14"/>
-          <p:cNvSpPr/>
-          <p:nvPr/>
-        </p:nvSpPr>
-        <p:spPr>
-          <a:xfrm>
-            <a:off x="822960" y="4891532"/>
-            <a:ext cx="365760" cy="365760"/>
-          </a:xfrm>
-          <a:prstGeom prst="ellipse">
-            <a:avLst/>
-          </a:prstGeom>
-          <a:solidFill>
-            <a:srgbClr val="111111"/>
-          </a:solidFill>
-          <a:ln w="15875">
-            <a:solidFill>
-              <a:srgbClr val="F2F0EA"/>
-            </a:solidFill>
-            <a:prstDash val="solid"/>
-          </a:ln>
-        </p:spPr>
-      </p:sp>
-      <p:sp>
-        <p:nvSpPr>
-          <p:cNvPr id="18" name="Text 15"/>
-          <p:cNvSpPr/>
-          <p:nvPr/>
-        </p:nvSpPr>
-        <p:spPr>
-          <a:xfrm>
-            <a:off x="822960" y="4891532"/>
-            <a:ext cx="365760" cy="365760"/>
-          </a:xfrm>
-          <a:prstGeom prst="rect">
-            <a:avLst/>
-          </a:prstGeom>
-          <a:noFill/>
-          <a:ln/>
-        </p:spPr>
-        <p:txBody>
-          <a:bodyPr wrap="square" lIns="0" tIns="0" rIns="0" bIns="0" rtlCol="0" anchor="ctr"/>
-          <a:lstStyle/>
-          <a:p>
-            <a:pPr algn="ctr" indent="0" marL="0">
-              <a:buNone/>
-            </a:pPr>
-            <a:r>
-              <a:rPr lang="en-US" sz="1300" b="1" dirty="0">
-                <a:solidFill>
-                  <a:srgbClr val="F2F0EA"/>
-                </a:solidFill>
-                <a:latin typeface="Arial" pitchFamily="34" charset="0"/>
-                <a:ea typeface="Arial" pitchFamily="34" charset="-122"/>
-                <a:cs typeface="Arial" pitchFamily="34" charset="-120"/>
-              </a:rPr>
-              <a:t>3</a:t>
-            </a:r>
-            <a:endParaRPr lang="en-US" sz="1300" dirty="0"/>
-          </a:p>
-        </p:txBody>
-      </p:sp>
-      <p:sp>
-        <p:nvSpPr>
-          <p:cNvPr id="19" name="Text 16"/>
-          <p:cNvSpPr/>
-          <p:nvPr/>
-        </p:nvSpPr>
-        <p:spPr>
-          <a:xfrm>
-            <a:off x="1417320" y="4900676"/>
-            <a:ext cx="9174175" cy="1223772"/>
-          </a:xfrm>
-          <a:prstGeom prst="rect">
-            <a:avLst/>
-          </a:prstGeom>
-          <a:noFill/>
-          <a:ln/>
-        </p:spPr>
-        <p:txBody>
-          <a:bodyPr wrap="square" lIns="0" tIns="0" rIns="0" bIns="0" rtlCol="0" anchor="t">
-            <a:normAutofit/>
-          </a:bodyPr>
-          <a:lstStyle/>
-          <a:p>
-            <a:pPr indent="0" marL="0">
-              <a:lnSpc>
-                <a:spcPct val="105000"/>
-              </a:lnSpc>
-              <a:buNone/>
-            </a:pPr>
-            <a:r>
-              <a:rPr lang="en-US" sz="2200" dirty="0">
-                <a:solidFill>
-                  <a:srgbClr val="F2F0EA"/>
-                </a:solidFill>
-                <a:latin typeface="Arial" pitchFamily="34" charset="0"/>
-                <a:ea typeface="Arial" pitchFamily="34" charset="-122"/>
-                <a:cs typeface="Arial" pitchFamily="34" charset="-120"/>
-              </a:rPr>
-              <a:t>Os séculos cruzam-se: a casa é do século XVI, o escritor do século XX, e o romance conta o século XVIII com o saber de hoje, passado por fora e presente por dentro.</a:t>
-            </a:r>
-            <a:endParaRPr lang="en-US" sz="2200" dirty="0"/>
+                <a:latin typeface="Georgia" pitchFamily="34" charset="0"/>
+                <a:ea typeface="Georgia" pitchFamily="34" charset="-122"/>
+                <a:cs typeface="Georgia" pitchFamily="34" charset="-120"/>
+              </a:rPr>
+              <a:t>.</a:t>
+            </a:r>
+            <a:endParaRPr lang="en-US" sz="2800" dirty="0"/>
           </a:p>
         </p:txBody>
       </p:sp>
@@ -5841,7 +6261,7 @@
                 <a:ea typeface="Arial" pitchFamily="34" charset="-122"/>
                 <a:cs typeface="Arial" pitchFamily="34" charset="-120"/>
               </a:rPr>
-              <a:t>ATÉ À PRÓXIMA AULA</a:t>
+              <a:t>SÍNTESE</a:t>
             </a:r>
             <a:endParaRPr lang="en-US" sz="1100" dirty="0"/>
           </a:p>
@@ -5856,7 +6276,7 @@
         <p:spPr>
           <a:xfrm>
             <a:off x="822960" y="868680"/>
-            <a:ext cx="7071055" cy="1188720"/>
+            <a:ext cx="9814255" cy="822960"/>
           </a:xfrm>
           <a:prstGeom prst="rect">
             <a:avLst/>
@@ -5874,7 +6294,7 @@
               <a:buNone/>
             </a:pPr>
             <a:r>
-              <a:rPr lang="en-US" sz="3000" dirty="0">
+              <a:rPr lang="en-US" sz="3400" dirty="0">
                 <a:solidFill>
                   <a:srgbClr val="F2F0EA"/>
                 </a:solidFill>
@@ -5882,9 +6302,9 @@
                 <a:ea typeface="Arial" pitchFamily="34" charset="-122"/>
                 <a:cs typeface="Arial" pitchFamily="34" charset="-120"/>
               </a:rPr>
-              <a:t>No telemóvel ou no PC da escola</a:t>
-            </a:r>
-            <a:endParaRPr lang="en-US" sz="3000" dirty="0"/>
+              <a:t>Para fixar</a:t>
+            </a:r>
+            <a:endParaRPr lang="en-US" sz="3400" dirty="0"/>
           </a:p>
         </p:txBody>
       </p:sp>
@@ -5896,7 +6316,7 @@
         </p:nvSpPr>
         <p:spPr>
           <a:xfrm>
-            <a:off x="822960" y="2121408"/>
+            <a:off x="822960" y="1746504"/>
             <a:ext cx="640080" cy="64008"/>
           </a:xfrm>
           <a:prstGeom prst="rect">
@@ -5921,8 +6341,8 @@
         </p:nvSpPr>
         <p:spPr>
           <a:xfrm>
-            <a:off x="1005840" y="2606040"/>
-            <a:ext cx="0" cy="1424940"/>
+            <a:off x="1005840" y="2286000"/>
+            <a:ext cx="0" cy="2788412"/>
           </a:xfrm>
           <a:prstGeom prst="line">
             <a:avLst/>
@@ -5944,7 +6364,7 @@
         </p:nvSpPr>
         <p:spPr>
           <a:xfrm>
-            <a:off x="822960" y="2423160"/>
+            <a:off x="822960" y="2103120"/>
             <a:ext cx="365760" cy="365760"/>
           </a:xfrm>
           <a:prstGeom prst="ellipse">
@@ -5969,7 +6389,7 @@
         </p:nvSpPr>
         <p:spPr>
           <a:xfrm>
-            <a:off x="822960" y="2423160"/>
+            <a:off x="822960" y="2103120"/>
             <a:ext cx="365760" cy="365760"/>
           </a:xfrm>
           <a:prstGeom prst="rect">
@@ -6008,8 +6428,8 @@
         </p:nvSpPr>
         <p:spPr>
           <a:xfrm>
-            <a:off x="1417320" y="2432304"/>
-            <a:ext cx="6430975" cy="542036"/>
+            <a:off x="1417320" y="2112264"/>
+            <a:ext cx="9174175" cy="1564640"/>
           </a:xfrm>
           <a:prstGeom prst="rect">
             <a:avLst/>
@@ -6038,7 +6458,7 @@
                 <a:ea typeface="Arial" pitchFamily="34" charset="-122"/>
                 <a:cs typeface="Arial" pitchFamily="34" charset="-120"/>
               </a:rPr>
-              <a:t>Termina o baralho da lição M9-F04</a:t>
+              <a:t>Nos itens situaste o lugar: a Casa dos Bicos fica a oriente do Terreiro do Paço, vai-se a pé desde o Cais do Sodré e a exposição permanente chama-se «A semente e os frutos».</a:t>
             </a:r>
             <a:endParaRPr lang="en-US" sz="2200" dirty="0"/>
           </a:p>
@@ -6052,7 +6472,7 @@
         </p:nvSpPr>
         <p:spPr>
           <a:xfrm>
-            <a:off x="822960" y="2965196"/>
+            <a:off x="822960" y="3667760"/>
             <a:ext cx="365760" cy="365760"/>
           </a:xfrm>
           <a:prstGeom prst="ellipse">
@@ -6077,7 +6497,7 @@
         </p:nvSpPr>
         <p:spPr>
           <a:xfrm>
-            <a:off x="822960" y="2965196"/>
+            <a:off x="822960" y="3667760"/>
             <a:ext cx="365760" cy="365760"/>
           </a:xfrm>
           <a:prstGeom prst="rect">
@@ -6116,8 +6536,8 @@
         </p:nvSpPr>
         <p:spPr>
           <a:xfrm>
-            <a:off x="1417320" y="2974340"/>
-            <a:ext cx="6430975" cy="882904"/>
+            <a:off x="1417320" y="3676904"/>
+            <a:ext cx="9174175" cy="1223772"/>
           </a:xfrm>
           <a:prstGeom prst="rect">
             <a:avLst/>
@@ -6146,7 +6566,41 @@
                 <a:ea typeface="Arial" pitchFamily="34" charset="-122"/>
                 <a:cs typeface="Arial" pitchFamily="34" charset="-120"/>
               </a:rPr>
-              <a:t>Espreita a lição seguinte, «De quem é uma obra?»</a:t>
+              <a:t>No caderno de campo, primeiro observas e registas com fonte, e só depois ligas ao </a:t>
+            </a:r>
+            <a:pPr indent="0" marL="0">
+              <a:lnSpc>
+                <a:spcPct val="105000"/>
+              </a:lnSpc>
+              <a:buNone/>
+            </a:pPr>
+            <a:r>
+              <a:rPr lang="en-US" sz="2200" i="1" dirty="0">
+                <a:solidFill>
+                  <a:srgbClr val="F2F0EA"/>
+                </a:solidFill>
+                <a:latin typeface="Arial" pitchFamily="34" charset="0"/>
+                <a:ea typeface="Arial" pitchFamily="34" charset="-122"/>
+                <a:cs typeface="Arial" pitchFamily="34" charset="-120"/>
+              </a:rPr>
+              <a:t>Memorial</a:t>
+            </a:r>
+            <a:pPr indent="0" marL="0">
+              <a:lnSpc>
+                <a:spcPct val="105000"/>
+              </a:lnSpc>
+              <a:buNone/>
+            </a:pPr>
+            <a:r>
+              <a:rPr lang="en-US" sz="2200" dirty="0">
+                <a:solidFill>
+                  <a:srgbClr val="F2F0EA"/>
+                </a:solidFill>
+                <a:latin typeface="Arial" pitchFamily="34" charset="0"/>
+                <a:ea typeface="Arial" pitchFamily="34" charset="-122"/>
+                <a:cs typeface="Arial" pitchFamily="34" charset="-120"/>
+              </a:rPr>
+              <a:t>; um dado biográfico novo é um facto da vida de Saramago que ainda não sabias.</a:t>
             </a:r>
             <a:endParaRPr lang="en-US" sz="2200" dirty="0"/>
           </a:p>
@@ -6160,7 +6614,7 @@
         </p:nvSpPr>
         <p:spPr>
           <a:xfrm>
-            <a:off x="822960" y="3848100"/>
+            <a:off x="822960" y="4891532"/>
             <a:ext cx="365760" cy="365760"/>
           </a:xfrm>
           <a:prstGeom prst="ellipse">
@@ -6185,7 +6639,7 @@
         </p:nvSpPr>
         <p:spPr>
           <a:xfrm>
-            <a:off x="822960" y="3848100"/>
+            <a:off x="822960" y="4891532"/>
             <a:ext cx="365760" cy="365760"/>
           </a:xfrm>
           <a:prstGeom prst="rect">
@@ -6224,8 +6678,8 @@
         </p:nvSpPr>
         <p:spPr>
           <a:xfrm>
-            <a:off x="1417320" y="3857244"/>
-            <a:ext cx="6430975" cy="882904"/>
+            <a:off x="1417320" y="4900676"/>
+            <a:ext cx="9174175" cy="1223772"/>
           </a:xfrm>
           <a:prstGeom prst="rect">
             <a:avLst/>
@@ -6254,99 +6708,9 @@
                 <a:ea typeface="Arial" pitchFamily="34" charset="-122"/>
                 <a:cs typeface="Arial" pitchFamily="34" charset="-120"/>
               </a:rPr>
-              <a:t>Antes de sair: foto do caderno para o portefólio</a:t>
+              <a:t>Os séculos cruzam-se: a casa é do século XVI, o escritor do século XX, e o romance conta o século XVIII com o saber de hoje, passado por fora e presente por dentro.</a:t>
             </a:r>
             <a:endParaRPr lang="en-US" sz="2200" dirty="0"/>
-          </a:p>
-        </p:txBody>
-      </p:sp>
-      <p:sp>
-        <p:nvSpPr>
-          <p:cNvPr id="20" name="Shape 17"/>
-          <p:cNvSpPr/>
-          <p:nvPr/>
-        </p:nvSpPr>
-        <p:spPr>
-          <a:xfrm>
-            <a:off x="8332927" y="1033272"/>
-            <a:ext cx="3145536" cy="3145536"/>
-          </a:xfrm>
-          <a:prstGeom prst="rect">
-            <a:avLst/>
-          </a:prstGeom>
-          <a:solidFill>
-            <a:srgbClr val="FFFFFF"/>
-          </a:solidFill>
-          <a:ln w="12700">
-            <a:solidFill>
-              <a:srgbClr val="F2F0EA"/>
-            </a:solidFill>
-            <a:prstDash val="solid"/>
-          </a:ln>
-        </p:spPr>
-      </p:sp>
-      <p:pic>
-        <p:nvPicPr>
-          <p:cNvPr id="21" name="Image 0" descr="/home/user/epi-portugues-fontes/_interno/biblioteca-imagens/qr/passo-m9-f04.png">    </p:cNvPr>
-          <p:cNvPicPr>
-            <a:picLocks noChangeAspect="1"/>
-          </p:cNvPicPr>
-          <p:nvPr/>
-        </p:nvPicPr>
-        <p:blipFill>
-          <a:blip r:embed="rId1"/>
-          <a:stretch>
-            <a:fillRect/>
-          </a:stretch>
-        </p:blipFill>
-        <p:spPr>
-          <a:xfrm>
-            <a:off x="8442655" y="1143000"/>
-            <a:ext cx="2926080" cy="2926080"/>
-          </a:xfrm>
-          <a:prstGeom prst="rect">
-            <a:avLst/>
-          </a:prstGeom>
-        </p:spPr>
-      </p:pic>
-      <p:sp>
-        <p:nvSpPr>
-          <p:cNvPr id="22" name="Text 18"/>
-          <p:cNvSpPr/>
-          <p:nvPr/>
-        </p:nvSpPr>
-        <p:spPr>
-          <a:xfrm>
-            <a:off x="8332927" y="4343400"/>
-            <a:ext cx="3145536" cy="640080"/>
-          </a:xfrm>
-          <a:prstGeom prst="rect">
-            <a:avLst/>
-          </a:prstGeom>
-          <a:noFill/>
-          <a:ln/>
-        </p:spPr>
-        <p:txBody>
-          <a:bodyPr wrap="square" lIns="0" tIns="0" rIns="0" bIns="0" rtlCol="0" anchor="t">
-            <a:normAutofit/>
-          </a:bodyPr>
-          <a:lstStyle/>
-          <a:p>
-            <a:pPr algn="ctr" indent="0" marL="0">
-              <a:buNone/>
-            </a:pPr>
-            <a:r>
-              <a:rPr lang="en-US" sz="1200" dirty="0">
-                <a:solidFill>
-                  <a:srgbClr val="F2F0EA"/>
-                </a:solidFill>
-                <a:latin typeface="Arial" pitchFamily="34" charset="0"/>
-                <a:ea typeface="Arial" pitchFamily="34" charset="-122"/>
-                <a:cs typeface="Arial" pitchFamily="34" charset="-120"/>
-              </a:rPr>
-              <a:t>pedrohfernandes-klk.github.io/​pt/​m9/​</a:t>
-            </a:r>
-            <a:endParaRPr lang="en-US" sz="1200" dirty="0"/>
           </a:p>
         </p:txBody>
       </p:sp>
